--- a/templates/BNI_テンプレート_ビジタープレゼン.pptx
+++ b/templates/BNI_テンプレート_ビジタープレゼン.pptx
@@ -11595,7 +11595,7 @@
                 <a:latin typeface="Meiryo UI" panose="020B0604030504040204" pitchFamily="34" charset="-128"/>
                 <a:ea typeface="Meiryo UI" panose="020B0604030504040204" pitchFamily="34" charset="-128"/>
               </a:rPr>
-              <a:t>伊東 克彦 様</a:t>
+              <a:t>伊原 克己 様</a:t>
             </a:r>
             <a:endParaRPr kumimoji="0" lang="ja-JP" altLang="en-US" sz="8000" b="1" i="0" u="none" strike="noStrike" kern="1200" cap="none" spc="0" normalizeH="0" baseline="0" noProof="0" dirty="0">
               <a:ln>
@@ -11744,7 +11744,7 @@
                 <a:latin typeface="Meiryo UI" panose="020B0604030504040204" pitchFamily="50" charset="-128"/>
                 <a:ea typeface="Meiryo UI" panose="020B0604030504040204" pitchFamily="50" charset="-128"/>
               </a:rPr>
-              <a:t>株式会社エコ企画</a:t>
+              <a:t>株式会社見本企画</a:t>
             </a:r>
             <a:endParaRPr kumimoji="0" lang="en-US" altLang="ja-JP" sz="4400" b="1" u="none" strike="noStrike" kern="1200" cap="none" spc="0" normalizeH="0" baseline="0" noProof="0" dirty="0">
               <a:ln>
